--- a/ゲーム科1年/00_前期/ゲームプログラミングⅡ/02_エフェクト.pptx
+++ b/ゲーム科1年/00_前期/ゲームプログラミングⅡ/02_エフェクト.pptx
@@ -267,7 +267,7 @@
           <a:p>
             <a:fld id="{E9CC885B-4903-4D54-9A93-00025F12DED9}" type="datetimeFigureOut">
               <a:rPr kumimoji="1" lang="ja-JP" altLang="en-US" smtClean="0"/>
-              <a:t>2024/9/13</a:t>
+              <a:t>2025/1/6</a:t>
             </a:fld>
             <a:endParaRPr kumimoji="1" lang="ja-JP" altLang="en-US"/>
           </a:p>
@@ -497,7 +497,7 @@
           <a:p>
             <a:fld id="{E9CC885B-4903-4D54-9A93-00025F12DED9}" type="datetimeFigureOut">
               <a:rPr kumimoji="1" lang="ja-JP" altLang="en-US" smtClean="0"/>
-              <a:t>2024/9/13</a:t>
+              <a:t>2025/1/6</a:t>
             </a:fld>
             <a:endParaRPr kumimoji="1" lang="ja-JP" altLang="en-US"/>
           </a:p>
@@ -737,7 +737,7 @@
           <a:p>
             <a:fld id="{E9CC885B-4903-4D54-9A93-00025F12DED9}" type="datetimeFigureOut">
               <a:rPr kumimoji="1" lang="ja-JP" altLang="en-US" smtClean="0"/>
-              <a:t>2024/9/13</a:t>
+              <a:t>2025/1/6</a:t>
             </a:fld>
             <a:endParaRPr kumimoji="1" lang="ja-JP" altLang="en-US"/>
           </a:p>
@@ -967,7 +967,7 @@
           <a:p>
             <a:fld id="{E9CC885B-4903-4D54-9A93-00025F12DED9}" type="datetimeFigureOut">
               <a:rPr kumimoji="1" lang="ja-JP" altLang="en-US" smtClean="0"/>
-              <a:t>2024/9/13</a:t>
+              <a:t>2025/1/6</a:t>
             </a:fld>
             <a:endParaRPr kumimoji="1" lang="ja-JP" altLang="en-US"/>
           </a:p>
@@ -1242,7 +1242,7 @@
           <a:p>
             <a:fld id="{E9CC885B-4903-4D54-9A93-00025F12DED9}" type="datetimeFigureOut">
               <a:rPr kumimoji="1" lang="ja-JP" altLang="en-US" smtClean="0"/>
-              <a:t>2024/9/13</a:t>
+              <a:t>2025/1/6</a:t>
             </a:fld>
             <a:endParaRPr kumimoji="1" lang="ja-JP" altLang="en-US"/>
           </a:p>
@@ -1571,7 +1571,7 @@
           <a:p>
             <a:fld id="{E9CC885B-4903-4D54-9A93-00025F12DED9}" type="datetimeFigureOut">
               <a:rPr kumimoji="1" lang="ja-JP" altLang="en-US" smtClean="0"/>
-              <a:t>2024/9/13</a:t>
+              <a:t>2025/1/6</a:t>
             </a:fld>
             <a:endParaRPr kumimoji="1" lang="ja-JP" altLang="en-US"/>
           </a:p>
@@ -2047,7 +2047,7 @@
           <a:p>
             <a:fld id="{E9CC885B-4903-4D54-9A93-00025F12DED9}" type="datetimeFigureOut">
               <a:rPr kumimoji="1" lang="ja-JP" altLang="en-US" smtClean="0"/>
-              <a:t>2024/9/13</a:t>
+              <a:t>2025/1/6</a:t>
             </a:fld>
             <a:endParaRPr kumimoji="1" lang="ja-JP" altLang="en-US"/>
           </a:p>
@@ -2188,7 +2188,7 @@
           <a:p>
             <a:fld id="{E9CC885B-4903-4D54-9A93-00025F12DED9}" type="datetimeFigureOut">
               <a:rPr kumimoji="1" lang="ja-JP" altLang="en-US" smtClean="0"/>
-              <a:t>2024/9/13</a:t>
+              <a:t>2025/1/6</a:t>
             </a:fld>
             <a:endParaRPr kumimoji="1" lang="ja-JP" altLang="en-US"/>
           </a:p>
@@ -2301,7 +2301,7 @@
           <a:p>
             <a:fld id="{E9CC885B-4903-4D54-9A93-00025F12DED9}" type="datetimeFigureOut">
               <a:rPr kumimoji="1" lang="ja-JP" altLang="en-US" smtClean="0"/>
-              <a:t>2024/9/13</a:t>
+              <a:t>2025/1/6</a:t>
             </a:fld>
             <a:endParaRPr kumimoji="1" lang="ja-JP" altLang="en-US"/>
           </a:p>
@@ -2644,7 +2644,7 @@
           <a:p>
             <a:fld id="{E9CC885B-4903-4D54-9A93-00025F12DED9}" type="datetimeFigureOut">
               <a:rPr kumimoji="1" lang="ja-JP" altLang="en-US" smtClean="0"/>
-              <a:t>2024/9/13</a:t>
+              <a:t>2025/1/6</a:t>
             </a:fld>
             <a:endParaRPr kumimoji="1" lang="ja-JP" altLang="en-US"/>
           </a:p>
@@ -2932,7 +2932,7 @@
           <a:p>
             <a:fld id="{E9CC885B-4903-4D54-9A93-00025F12DED9}" type="datetimeFigureOut">
               <a:rPr kumimoji="1" lang="ja-JP" altLang="en-US" smtClean="0"/>
-              <a:t>2024/9/13</a:t>
+              <a:t>2025/1/6</a:t>
             </a:fld>
             <a:endParaRPr kumimoji="1" lang="ja-JP" altLang="en-US"/>
           </a:p>
@@ -3205,7 +3205,7 @@
           <a:p>
             <a:fld id="{E9CC885B-4903-4D54-9A93-00025F12DED9}" type="datetimeFigureOut">
               <a:rPr kumimoji="1" lang="ja-JP" altLang="en-US" smtClean="0"/>
-              <a:t>2024/9/13</a:t>
+              <a:t>2025/1/6</a:t>
             </a:fld>
             <a:endParaRPr kumimoji="1" lang="ja-JP" altLang="en-US"/>
           </a:p>
@@ -4784,7 +4784,7 @@
         <p:spPr>
           <a:xfrm>
             <a:off x="567542" y="1216429"/>
-            <a:ext cx="9062096" cy="830997"/>
+            <a:ext cx="9442008" cy="830997"/>
           </a:xfrm>
           <a:prstGeom prst="rect">
             <a:avLst/>
@@ -4805,11 +4805,19 @@
           </a:p>
           <a:p>
             <a:r>
-              <a:rPr kumimoji="1" lang="en-US" altLang="ja-JP" sz="2400" dirty="0"/>
+              <a:rPr kumimoji="1" lang="en-US" altLang="ja-JP" sz="2400" b="1" dirty="0">
+                <a:solidFill>
+                  <a:srgbClr val="FF0000"/>
+                </a:solidFill>
+              </a:rPr>
               <a:t>Anim</a:t>
             </a:r>
             <a:r>
-              <a:rPr lang="en-US" altLang="ja-JP" sz="2400" dirty="0"/>
+              <a:rPr lang="en-US" altLang="ja-JP" sz="2400" b="1" dirty="0">
+                <a:solidFill>
+                  <a:srgbClr val="FF0000"/>
+                </a:solidFill>
+              </a:rPr>
               <a:t>ationEffect.cpp</a:t>
             </a:r>
             <a:r>
@@ -4817,12 +4825,24 @@
               <a:t>の</a:t>
             </a:r>
             <a:r>
-              <a:rPr lang="en-US" altLang="ja-JP" sz="2400" dirty="0" err="1"/>
+              <a:rPr lang="en-US" altLang="ja-JP" sz="2400" b="1" dirty="0" err="1">
+                <a:solidFill>
+                  <a:srgbClr val="0070C0"/>
+                </a:solidFill>
+              </a:rPr>
               <a:t>StepAnimationEffect</a:t>
             </a:r>
             <a:r>
+              <a:rPr lang="ja-JP" altLang="en-US" sz="2400" b="1" dirty="0">
+                <a:solidFill>
+                  <a:srgbClr val="0070C0"/>
+                </a:solidFill>
+              </a:rPr>
+              <a:t>関数</a:t>
+            </a:r>
+            <a:r>
               <a:rPr lang="ja-JP" altLang="en-US" sz="2400" dirty="0"/>
-              <a:t>関数を見てみます。</a:t>
+              <a:t>を見てみます。</a:t>
             </a:r>
             <a:endParaRPr kumimoji="1" lang="en-US" altLang="ja-JP" sz="2400" dirty="0"/>
           </a:p>
@@ -4962,12 +4982,24 @@
               <a:t>このように</a:t>
             </a:r>
             <a:r>
-              <a:rPr kumimoji="1" lang="en-US" altLang="ja-JP" sz="2400" dirty="0"/>
+              <a:rPr kumimoji="1" lang="en-US" altLang="ja-JP" sz="2400" b="1" dirty="0">
+                <a:solidFill>
+                  <a:srgbClr val="0070C0"/>
+                </a:solidFill>
+              </a:rPr>
               <a:t>Step</a:t>
             </a:r>
             <a:r>
+              <a:rPr kumimoji="1" lang="ja-JP" altLang="en-US" sz="2400" b="1" dirty="0">
+                <a:solidFill>
+                  <a:srgbClr val="0070C0"/>
+                </a:solidFill>
+              </a:rPr>
+              <a:t>関数</a:t>
+            </a:r>
+            <a:r>
               <a:rPr kumimoji="1" lang="ja-JP" altLang="en-US" sz="2400" dirty="0"/>
-              <a:t>関数で一定時間たったら次のコマに進む処理ができています。</a:t>
+              <a:t>で一定時間たったら次のコマに進む処理ができています。</a:t>
             </a:r>
             <a:endParaRPr kumimoji="1" lang="en-US" altLang="ja-JP" sz="2400" dirty="0"/>
           </a:p>
@@ -5446,7 +5478,7 @@
         <p:spPr>
           <a:xfrm>
             <a:off x="567542" y="1216429"/>
-            <a:ext cx="4905510" cy="461665"/>
+            <a:ext cx="5040162" cy="461665"/>
           </a:xfrm>
           <a:prstGeom prst="rect">
             <a:avLst/>
@@ -5460,12 +5492,24 @@
           <a:lstStyle/>
           <a:p>
             <a:r>
-              <a:rPr kumimoji="1" lang="en-US" altLang="ja-JP" sz="2400" dirty="0" err="1"/>
+              <a:rPr kumimoji="1" lang="en-US" altLang="ja-JP" sz="2400" b="1" dirty="0" err="1">
+                <a:solidFill>
+                  <a:srgbClr val="0070C0"/>
+                </a:solidFill>
+              </a:rPr>
               <a:t>DrawRectGraph</a:t>
             </a:r>
             <a:r>
+              <a:rPr kumimoji="1" lang="ja-JP" altLang="en-US" sz="2400" b="1" dirty="0">
+                <a:solidFill>
+                  <a:srgbClr val="0070C0"/>
+                </a:solidFill>
+              </a:rPr>
+              <a:t>関数</a:t>
+            </a:r>
+            <a:r>
               <a:rPr kumimoji="1" lang="ja-JP" altLang="en-US" sz="2400" dirty="0"/>
-              <a:t>関数の詳細です。</a:t>
+              <a:t>の詳細です。</a:t>
             </a:r>
             <a:endParaRPr kumimoji="1" lang="en-US" altLang="ja-JP" sz="2400" dirty="0"/>
           </a:p>
